--- a/reports/templates/lab_template.pptx
+++ b/reports/templates/lab_template.pptx
@@ -1476,7 +1476,7 @@
           <a:bodyPr anchor="t"/>
           <a:lstStyle>
             <a:lvl1pPr algn="l">
-              <a:defRPr sz="3000" b="1" cap="all"/>
+              <a:defRPr sz="2100" b="1" cap="all"/>
             </a:lvl1pPr>
           </a:lstStyle>
           <a:p>
@@ -1508,7 +1508,7 @@
           <a:lstStyle>
             <a:lvl1pPr marL="0" indent="0">
               <a:buNone/>
-              <a:defRPr sz="1500">
+              <a:defRPr sz="1050">
                 <a:solidFill>
                   <a:schemeClr val="tx1">
                     <a:tint val="75000"/>
@@ -1518,7 +1518,7 @@
             </a:lvl1pPr>
             <a:lvl2pPr marL="342900" indent="0">
               <a:buNone/>
-              <a:defRPr sz="1350">
+              <a:defRPr sz="944">
                 <a:solidFill>
                   <a:schemeClr val="tx1">
                     <a:tint val="75000"/>
@@ -1528,7 +1528,7 @@
             </a:lvl2pPr>
             <a:lvl3pPr marL="685800" indent="0">
               <a:buNone/>
-              <a:defRPr sz="1200">
+              <a:defRPr sz="840">
                 <a:solidFill>
                   <a:schemeClr val="tx1">
                     <a:tint val="75000"/>
@@ -1538,7 +1538,7 @@
             </a:lvl3pPr>
             <a:lvl4pPr marL="1028700" indent="0">
               <a:buNone/>
-              <a:defRPr sz="1050">
+              <a:defRPr sz="800">
                 <a:solidFill>
                   <a:schemeClr val="tx1">
                     <a:tint val="75000"/>
@@ -1548,7 +1548,7 @@
             </a:lvl4pPr>
             <a:lvl5pPr marL="1371600" indent="0">
               <a:buNone/>
-              <a:defRPr sz="1050">
+              <a:defRPr sz="800">
                 <a:solidFill>
                   <a:schemeClr val="tx1">
                     <a:tint val="75000"/>
@@ -1558,7 +1558,7 @@
             </a:lvl5pPr>
             <a:lvl6pPr marL="1714500" indent="0">
               <a:buNone/>
-              <a:defRPr sz="1050">
+              <a:defRPr sz="800">
                 <a:solidFill>
                   <a:schemeClr val="tx1">
                     <a:tint val="75000"/>
@@ -1568,7 +1568,7 @@
             </a:lvl6pPr>
             <a:lvl7pPr marL="2057400" indent="0">
               <a:buNone/>
-              <a:defRPr sz="1050">
+              <a:defRPr sz="800">
                 <a:solidFill>
                   <a:schemeClr val="tx1">
                     <a:tint val="75000"/>
@@ -1578,7 +1578,7 @@
             </a:lvl7pPr>
             <a:lvl8pPr marL="2400300" indent="0">
               <a:buNone/>
-              <a:defRPr sz="1050">
+              <a:defRPr sz="800">
                 <a:solidFill>
                   <a:schemeClr val="tx1">
                     <a:tint val="75000"/>
@@ -1588,7 +1588,7 @@
             </a:lvl8pPr>
             <a:lvl9pPr marL="2743200" indent="0">
               <a:buNone/>
-              <a:defRPr sz="1050">
+              <a:defRPr sz="800">
                 <a:solidFill>
                   <a:schemeClr val="tx1">
                     <a:tint val="75000"/>
@@ -1743,31 +1743,31 @@
           <a:bodyPr/>
           <a:lstStyle>
             <a:lvl1pPr>
-              <a:defRPr sz="2100"/>
+              <a:defRPr sz="1470"/>
             </a:lvl1pPr>
             <a:lvl2pPr>
-              <a:defRPr sz="1800"/>
+              <a:defRPr sz="1260"/>
             </a:lvl2pPr>
             <a:lvl3pPr>
-              <a:defRPr sz="1500"/>
+              <a:defRPr sz="1050"/>
             </a:lvl3pPr>
             <a:lvl4pPr>
-              <a:defRPr sz="1350"/>
+              <a:defRPr sz="944"/>
             </a:lvl4pPr>
             <a:lvl5pPr>
-              <a:defRPr sz="1350"/>
+              <a:defRPr sz="944"/>
             </a:lvl5pPr>
             <a:lvl6pPr>
-              <a:defRPr sz="1350"/>
+              <a:defRPr sz="944"/>
             </a:lvl6pPr>
             <a:lvl7pPr>
-              <a:defRPr sz="1350"/>
+              <a:defRPr sz="944"/>
             </a:lvl7pPr>
             <a:lvl8pPr>
-              <a:defRPr sz="1350"/>
+              <a:defRPr sz="944"/>
             </a:lvl8pPr>
             <a:lvl9pPr>
-              <a:defRPr sz="1350"/>
+              <a:defRPr sz="944"/>
             </a:lvl9pPr>
           </a:lstStyle>
           <a:p>
@@ -1827,31 +1827,31 @@
           <a:bodyPr/>
           <a:lstStyle>
             <a:lvl1pPr>
-              <a:defRPr sz="2100"/>
+              <a:defRPr sz="1470"/>
             </a:lvl1pPr>
             <a:lvl2pPr>
-              <a:defRPr sz="1800"/>
+              <a:defRPr sz="1260"/>
             </a:lvl2pPr>
             <a:lvl3pPr>
-              <a:defRPr sz="1500"/>
+              <a:defRPr sz="1050"/>
             </a:lvl3pPr>
             <a:lvl4pPr>
-              <a:defRPr sz="1350"/>
+              <a:defRPr sz="944"/>
             </a:lvl4pPr>
             <a:lvl5pPr>
-              <a:defRPr sz="1350"/>
+              <a:defRPr sz="944"/>
             </a:lvl5pPr>
             <a:lvl6pPr>
-              <a:defRPr sz="1350"/>
+              <a:defRPr sz="944"/>
             </a:lvl6pPr>
             <a:lvl7pPr>
-              <a:defRPr sz="1350"/>
+              <a:defRPr sz="944"/>
             </a:lvl7pPr>
             <a:lvl8pPr>
-              <a:defRPr sz="1350"/>
+              <a:defRPr sz="944"/>
             </a:lvl8pPr>
             <a:lvl9pPr>
-              <a:defRPr sz="1350"/>
+              <a:defRPr sz="944"/>
             </a:lvl9pPr>
           </a:lstStyle>
           <a:p>
@@ -2033,39 +2033,39 @@
           <a:lstStyle>
             <a:lvl1pPr marL="0" indent="0">
               <a:buNone/>
-              <a:defRPr sz="1800" b="1"/>
+              <a:defRPr sz="1260" b="1"/>
             </a:lvl1pPr>
             <a:lvl2pPr marL="342900" indent="0">
               <a:buNone/>
-              <a:defRPr sz="1500" b="1"/>
+              <a:defRPr sz="1050" b="1"/>
             </a:lvl2pPr>
             <a:lvl3pPr marL="685800" indent="0">
               <a:buNone/>
-              <a:defRPr sz="1350" b="1"/>
+              <a:defRPr sz="944" b="1"/>
             </a:lvl3pPr>
             <a:lvl4pPr marL="1028700" indent="0">
               <a:buNone/>
-              <a:defRPr sz="1200" b="1"/>
+              <a:defRPr sz="840" b="1"/>
             </a:lvl4pPr>
             <a:lvl5pPr marL="1371600" indent="0">
               <a:buNone/>
-              <a:defRPr sz="1200" b="1"/>
+              <a:defRPr sz="840" b="1"/>
             </a:lvl5pPr>
             <a:lvl6pPr marL="1714500" indent="0">
               <a:buNone/>
-              <a:defRPr sz="1200" b="1"/>
+              <a:defRPr sz="840" b="1"/>
             </a:lvl6pPr>
             <a:lvl7pPr marL="2057400" indent="0">
               <a:buNone/>
-              <a:defRPr sz="1200" b="1"/>
+              <a:defRPr sz="840" b="1"/>
             </a:lvl7pPr>
             <a:lvl8pPr marL="2400300" indent="0">
               <a:buNone/>
-              <a:defRPr sz="1200" b="1"/>
+              <a:defRPr sz="840" b="1"/>
             </a:lvl8pPr>
             <a:lvl9pPr marL="2743200" indent="0">
               <a:buNone/>
-              <a:defRPr sz="1200" b="1"/>
+              <a:defRPr sz="840" b="1"/>
             </a:lvl9pPr>
           </a:lstStyle>
           <a:p>
@@ -2097,31 +2097,31 @@
           <a:bodyPr/>
           <a:lstStyle>
             <a:lvl1pPr>
-              <a:defRPr sz="1800"/>
+              <a:defRPr sz="1260"/>
             </a:lvl1pPr>
             <a:lvl2pPr>
-              <a:defRPr sz="1500"/>
+              <a:defRPr sz="1050"/>
             </a:lvl2pPr>
             <a:lvl3pPr>
-              <a:defRPr sz="1350"/>
+              <a:defRPr sz="944"/>
             </a:lvl3pPr>
             <a:lvl4pPr>
-              <a:defRPr sz="1200"/>
+              <a:defRPr sz="840"/>
             </a:lvl4pPr>
             <a:lvl5pPr>
-              <a:defRPr sz="1200"/>
+              <a:defRPr sz="840"/>
             </a:lvl5pPr>
             <a:lvl6pPr>
-              <a:defRPr sz="1200"/>
+              <a:defRPr sz="840"/>
             </a:lvl6pPr>
             <a:lvl7pPr>
-              <a:defRPr sz="1200"/>
+              <a:defRPr sz="840"/>
             </a:lvl7pPr>
             <a:lvl8pPr>
-              <a:defRPr sz="1200"/>
+              <a:defRPr sz="840"/>
             </a:lvl8pPr>
             <a:lvl9pPr>
-              <a:defRPr sz="1200"/>
+              <a:defRPr sz="840"/>
             </a:lvl9pPr>
           </a:lstStyle>
           <a:p>
@@ -2182,39 +2182,39 @@
           <a:lstStyle>
             <a:lvl1pPr marL="0" indent="0">
               <a:buNone/>
-              <a:defRPr sz="1800" b="1"/>
+              <a:defRPr sz="1260" b="1"/>
             </a:lvl1pPr>
             <a:lvl2pPr marL="342900" indent="0">
               <a:buNone/>
-              <a:defRPr sz="1500" b="1"/>
+              <a:defRPr sz="1050" b="1"/>
             </a:lvl2pPr>
             <a:lvl3pPr marL="685800" indent="0">
               <a:buNone/>
-              <a:defRPr sz="1350" b="1"/>
+              <a:defRPr sz="944" b="1"/>
             </a:lvl3pPr>
             <a:lvl4pPr marL="1028700" indent="0">
               <a:buNone/>
-              <a:defRPr sz="1200" b="1"/>
+              <a:defRPr sz="840" b="1"/>
             </a:lvl4pPr>
             <a:lvl5pPr marL="1371600" indent="0">
               <a:buNone/>
-              <a:defRPr sz="1200" b="1"/>
+              <a:defRPr sz="840" b="1"/>
             </a:lvl5pPr>
             <a:lvl6pPr marL="1714500" indent="0">
               <a:buNone/>
-              <a:defRPr sz="1200" b="1"/>
+              <a:defRPr sz="840" b="1"/>
             </a:lvl6pPr>
             <a:lvl7pPr marL="2057400" indent="0">
               <a:buNone/>
-              <a:defRPr sz="1200" b="1"/>
+              <a:defRPr sz="840" b="1"/>
             </a:lvl7pPr>
             <a:lvl8pPr marL="2400300" indent="0">
               <a:buNone/>
-              <a:defRPr sz="1200" b="1"/>
+              <a:defRPr sz="840" b="1"/>
             </a:lvl8pPr>
             <a:lvl9pPr marL="2743200" indent="0">
               <a:buNone/>
-              <a:defRPr sz="1200" b="1"/>
+              <a:defRPr sz="840" b="1"/>
             </a:lvl9pPr>
           </a:lstStyle>
           <a:p>
@@ -2246,31 +2246,31 @@
           <a:bodyPr/>
           <a:lstStyle>
             <a:lvl1pPr>
-              <a:defRPr sz="1800"/>
+              <a:defRPr sz="1260"/>
             </a:lvl1pPr>
             <a:lvl2pPr>
-              <a:defRPr sz="1500"/>
+              <a:defRPr sz="1050"/>
             </a:lvl2pPr>
             <a:lvl3pPr>
-              <a:defRPr sz="1350"/>
+              <a:defRPr sz="944"/>
             </a:lvl3pPr>
             <a:lvl4pPr>
-              <a:defRPr sz="1200"/>
+              <a:defRPr sz="840"/>
             </a:lvl4pPr>
             <a:lvl5pPr>
-              <a:defRPr sz="1200"/>
+              <a:defRPr sz="840"/>
             </a:lvl5pPr>
             <a:lvl6pPr>
-              <a:defRPr sz="1200"/>
+              <a:defRPr sz="840"/>
             </a:lvl6pPr>
             <a:lvl7pPr>
-              <a:defRPr sz="1200"/>
+              <a:defRPr sz="840"/>
             </a:lvl7pPr>
             <a:lvl8pPr>
-              <a:defRPr sz="1200"/>
+              <a:defRPr sz="840"/>
             </a:lvl8pPr>
             <a:lvl9pPr>
-              <a:defRPr sz="1200"/>
+              <a:defRPr sz="840"/>
             </a:lvl9pPr>
           </a:lstStyle>
           <a:p>
@@ -2637,7 +2637,7 @@
           <a:bodyPr anchor="b"/>
           <a:lstStyle>
             <a:lvl1pPr algn="l">
-              <a:defRPr sz="1500" b="1"/>
+              <a:defRPr sz="1050" b="1"/>
             </a:lvl1pPr>
           </a:lstStyle>
           <a:p>
@@ -2668,31 +2668,31 @@
           <a:bodyPr/>
           <a:lstStyle>
             <a:lvl1pPr>
-              <a:defRPr sz="2400"/>
+              <a:defRPr sz="1680"/>
             </a:lvl1pPr>
             <a:lvl2pPr>
-              <a:defRPr sz="2100"/>
+              <a:defRPr sz="1470"/>
             </a:lvl2pPr>
             <a:lvl3pPr>
-              <a:defRPr sz="1800"/>
+              <a:defRPr sz="1260"/>
             </a:lvl3pPr>
             <a:lvl4pPr>
-              <a:defRPr sz="1500"/>
+              <a:defRPr sz="1050"/>
             </a:lvl4pPr>
             <a:lvl5pPr>
-              <a:defRPr sz="1500"/>
+              <a:defRPr sz="1050"/>
             </a:lvl5pPr>
             <a:lvl6pPr>
-              <a:defRPr sz="1500"/>
+              <a:defRPr sz="1050"/>
             </a:lvl6pPr>
             <a:lvl7pPr>
-              <a:defRPr sz="1500"/>
+              <a:defRPr sz="1050"/>
             </a:lvl7pPr>
             <a:lvl8pPr>
-              <a:defRPr sz="1500"/>
+              <a:defRPr sz="1050"/>
             </a:lvl8pPr>
             <a:lvl9pPr>
-              <a:defRPr sz="1500"/>
+              <a:defRPr sz="1050"/>
             </a:lvl9pPr>
           </a:lstStyle>
           <a:p>
@@ -2753,39 +2753,39 @@
           <a:lstStyle>
             <a:lvl1pPr marL="0" indent="0">
               <a:buNone/>
-              <a:defRPr sz="1050"/>
+              <a:defRPr sz="800"/>
             </a:lvl1pPr>
             <a:lvl2pPr marL="342900" indent="0">
               <a:buNone/>
-              <a:defRPr sz="900"/>
+              <a:defRPr sz="800"/>
             </a:lvl2pPr>
             <a:lvl3pPr marL="685800" indent="0">
               <a:buNone/>
-              <a:defRPr sz="750"/>
+              <a:defRPr sz="800"/>
             </a:lvl3pPr>
             <a:lvl4pPr marL="1028700" indent="0">
               <a:buNone/>
-              <a:defRPr sz="675"/>
+              <a:defRPr sz="800"/>
             </a:lvl4pPr>
             <a:lvl5pPr marL="1371600" indent="0">
               <a:buNone/>
-              <a:defRPr sz="675"/>
+              <a:defRPr sz="800"/>
             </a:lvl5pPr>
             <a:lvl6pPr marL="1714500" indent="0">
               <a:buNone/>
-              <a:defRPr sz="675"/>
+              <a:defRPr sz="800"/>
             </a:lvl6pPr>
             <a:lvl7pPr marL="2057400" indent="0">
               <a:buNone/>
-              <a:defRPr sz="675"/>
+              <a:defRPr sz="800"/>
             </a:lvl7pPr>
             <a:lvl8pPr marL="2400300" indent="0">
               <a:buNone/>
-              <a:defRPr sz="675"/>
+              <a:defRPr sz="800"/>
             </a:lvl8pPr>
             <a:lvl9pPr marL="2743200" indent="0">
               <a:buNone/>
-              <a:defRPr sz="675"/>
+              <a:defRPr sz="800"/>
             </a:lvl9pPr>
           </a:lstStyle>
           <a:p>
@@ -2912,7 +2912,7 @@
           <a:bodyPr anchor="b"/>
           <a:lstStyle>
             <a:lvl1pPr algn="l">
-              <a:defRPr sz="1500" b="1"/>
+              <a:defRPr sz="1050" b="1"/>
             </a:lvl1pPr>
           </a:lstStyle>
           <a:p>
@@ -2944,39 +2944,39 @@
           <a:lstStyle>
             <a:lvl1pPr marL="0" indent="0">
               <a:buNone/>
-              <a:defRPr sz="2400"/>
+              <a:defRPr sz="1680"/>
             </a:lvl1pPr>
             <a:lvl2pPr marL="342900" indent="0">
               <a:buNone/>
-              <a:defRPr sz="2100"/>
+              <a:defRPr sz="1470"/>
             </a:lvl2pPr>
             <a:lvl3pPr marL="685800" indent="0">
               <a:buNone/>
-              <a:defRPr sz="1800"/>
+              <a:defRPr sz="1260"/>
             </a:lvl3pPr>
             <a:lvl4pPr marL="1028700" indent="0">
               <a:buNone/>
-              <a:defRPr sz="1500"/>
+              <a:defRPr sz="1050"/>
             </a:lvl4pPr>
             <a:lvl5pPr marL="1371600" indent="0">
               <a:buNone/>
-              <a:defRPr sz="1500"/>
+              <a:defRPr sz="1050"/>
             </a:lvl5pPr>
             <a:lvl6pPr marL="1714500" indent="0">
               <a:buNone/>
-              <a:defRPr sz="1500"/>
+              <a:defRPr sz="1050"/>
             </a:lvl6pPr>
             <a:lvl7pPr marL="2057400" indent="0">
               <a:buNone/>
-              <a:defRPr sz="1500"/>
+              <a:defRPr sz="1050"/>
             </a:lvl7pPr>
             <a:lvl8pPr marL="2400300" indent="0">
               <a:buNone/>
-              <a:defRPr sz="1500"/>
+              <a:defRPr sz="1050"/>
             </a:lvl8pPr>
             <a:lvl9pPr marL="2743200" indent="0">
               <a:buNone/>
-              <a:defRPr sz="1500"/>
+              <a:defRPr sz="1050"/>
             </a:lvl9pPr>
           </a:lstStyle>
           <a:p>
@@ -3005,39 +3005,39 @@
           <a:lstStyle>
             <a:lvl1pPr marL="0" indent="0">
               <a:buNone/>
-              <a:defRPr sz="1050"/>
+              <a:defRPr sz="800"/>
             </a:lvl1pPr>
             <a:lvl2pPr marL="342900" indent="0">
               <a:buNone/>
-              <a:defRPr sz="900"/>
+              <a:defRPr sz="800"/>
             </a:lvl2pPr>
             <a:lvl3pPr marL="685800" indent="0">
               <a:buNone/>
-              <a:defRPr sz="750"/>
+              <a:defRPr sz="800"/>
             </a:lvl3pPr>
             <a:lvl4pPr marL="1028700" indent="0">
               <a:buNone/>
-              <a:defRPr sz="675"/>
+              <a:defRPr sz="800"/>
             </a:lvl4pPr>
             <a:lvl5pPr marL="1371600" indent="0">
               <a:buNone/>
-              <a:defRPr sz="675"/>
+              <a:defRPr sz="800"/>
             </a:lvl5pPr>
             <a:lvl6pPr marL="1714500" indent="0">
               <a:buNone/>
-              <a:defRPr sz="675"/>
+              <a:defRPr sz="800"/>
             </a:lvl6pPr>
             <a:lvl7pPr marL="2057400" indent="0">
               <a:buNone/>
-              <a:defRPr sz="675"/>
+              <a:defRPr sz="800"/>
             </a:lvl7pPr>
             <a:lvl8pPr marL="2400300" indent="0">
               <a:buNone/>
-              <a:defRPr sz="675"/>
+              <a:defRPr sz="800"/>
             </a:lvl8pPr>
             <a:lvl9pPr marL="2743200" indent="0">
               <a:buNone/>
-              <a:defRPr sz="675"/>
+              <a:defRPr sz="800"/>
             </a:lvl9pPr>
           </a:lstStyle>
           <a:p>
@@ -3265,7 +3265,7 @@
           <a:bodyPr vert="horz" lIns="91440" tIns="45720" rIns="91440" bIns="45720" rtlCol="0" anchor="ctr"/>
           <a:lstStyle>
             <a:lvl1pPr algn="l">
-              <a:defRPr sz="900">
+              <a:defRPr sz="800">
                 <a:solidFill>
                   <a:schemeClr val="tx1">
                     <a:tint val="75000"/>
@@ -3306,7 +3306,7 @@
           <a:bodyPr vert="horz" lIns="91440" tIns="45720" rIns="91440" bIns="45720" rtlCol="0" anchor="ctr"/>
           <a:lstStyle>
             <a:lvl1pPr algn="ctr">
-              <a:defRPr sz="900">
+              <a:defRPr sz="800">
                 <a:solidFill>
                   <a:schemeClr val="tx1">
                     <a:tint val="75000"/>
@@ -3343,7 +3343,7 @@
           <a:bodyPr vert="horz" lIns="91440" tIns="45720" rIns="91440" bIns="45720" rtlCol="0" anchor="ctr"/>
           <a:lstStyle>
             <a:lvl1pPr algn="r">
-              <a:defRPr sz="900">
+              <a:defRPr sz="800">
                 <a:solidFill>
                   <a:schemeClr val="tx1">
                     <a:tint val="75000"/>
@@ -3389,7 +3389,7 @@
           <a:spcPct val="0"/>
         </a:spcBef>
         <a:buNone/>
-        <a:defRPr sz="3300" kern="1200">
+        <a:defRPr sz="2310" kern="1200">
           <a:solidFill>
             <a:schemeClr val="tx1"/>
           </a:solidFill>
@@ -3406,7 +3406,7 @@
         </a:spcBef>
         <a:buFont typeface="Arial"/>
         <a:buChar char="•"/>
-        <a:defRPr sz="2400" kern="1200">
+        <a:defRPr sz="1680" kern="1200">
           <a:solidFill>
             <a:schemeClr val="tx1"/>
           </a:solidFill>
@@ -3421,7 +3421,7 @@
         </a:spcBef>
         <a:buFont typeface="Arial"/>
         <a:buChar char="–"/>
-        <a:defRPr sz="2100" kern="1200">
+        <a:defRPr sz="1470" kern="1200">
           <a:solidFill>
             <a:schemeClr val="tx1"/>
           </a:solidFill>
@@ -3436,7 +3436,7 @@
         </a:spcBef>
         <a:buFont typeface="Arial"/>
         <a:buChar char="•"/>
-        <a:defRPr sz="1800" kern="1200">
+        <a:defRPr sz="1260" kern="1200">
           <a:solidFill>
             <a:schemeClr val="tx1"/>
           </a:solidFill>
@@ -3451,7 +3451,7 @@
         </a:spcBef>
         <a:buFont typeface="Arial"/>
         <a:buChar char="–"/>
-        <a:defRPr sz="1500" kern="1200">
+        <a:defRPr sz="1050" kern="1200">
           <a:solidFill>
             <a:schemeClr val="tx1"/>
           </a:solidFill>
@@ -3466,7 +3466,7 @@
         </a:spcBef>
         <a:buFont typeface="Arial"/>
         <a:buChar char="»"/>
-        <a:defRPr sz="1500" kern="1200">
+        <a:defRPr sz="1050" kern="1200">
           <a:solidFill>
             <a:schemeClr val="tx1"/>
           </a:solidFill>
@@ -3481,7 +3481,7 @@
         </a:spcBef>
         <a:buFont typeface="Arial"/>
         <a:buChar char="•"/>
-        <a:defRPr sz="1500" kern="1200">
+        <a:defRPr sz="1050" kern="1200">
           <a:solidFill>
             <a:schemeClr val="tx1"/>
           </a:solidFill>
@@ -3496,7 +3496,7 @@
         </a:spcBef>
         <a:buFont typeface="Arial"/>
         <a:buChar char="•"/>
-        <a:defRPr sz="1500" kern="1200">
+        <a:defRPr sz="1050" kern="1200">
           <a:solidFill>
             <a:schemeClr val="tx1"/>
           </a:solidFill>
@@ -3511,7 +3511,7 @@
         </a:spcBef>
         <a:buFont typeface="Arial"/>
         <a:buChar char="•"/>
-        <a:defRPr sz="1500" kern="1200">
+        <a:defRPr sz="1050" kern="1200">
           <a:solidFill>
             <a:schemeClr val="tx1"/>
           </a:solidFill>
@@ -3526,7 +3526,7 @@
         </a:spcBef>
         <a:buFont typeface="Arial"/>
         <a:buChar char="•"/>
-        <a:defRPr sz="1500" kern="1200">
+        <a:defRPr sz="1050" kern="1200">
           <a:solidFill>
             <a:schemeClr val="tx1"/>
           </a:solidFill>
@@ -3541,7 +3541,7 @@
         <a:defRPr lang="en-US"/>
       </a:defPPr>
       <a:lvl1pPr marL="0" algn="l" defTabSz="342900" rtl="0" eaLnBrk="1" latinLnBrk="0" hangingPunct="1">
-        <a:defRPr sz="1350" kern="1200">
+        <a:defRPr sz="944" kern="1200">
           <a:solidFill>
             <a:schemeClr val="tx1"/>
           </a:solidFill>
@@ -3551,7 +3551,7 @@
         </a:defRPr>
       </a:lvl1pPr>
       <a:lvl2pPr marL="342900" algn="l" defTabSz="342900" rtl="0" eaLnBrk="1" latinLnBrk="0" hangingPunct="1">
-        <a:defRPr sz="1350" kern="1200">
+        <a:defRPr sz="944" kern="1200">
           <a:solidFill>
             <a:schemeClr val="tx1"/>
           </a:solidFill>
@@ -3561,7 +3561,7 @@
         </a:defRPr>
       </a:lvl2pPr>
       <a:lvl3pPr marL="685800" algn="l" defTabSz="342900" rtl="0" eaLnBrk="1" latinLnBrk="0" hangingPunct="1">
-        <a:defRPr sz="1350" kern="1200">
+        <a:defRPr sz="944" kern="1200">
           <a:solidFill>
             <a:schemeClr val="tx1"/>
           </a:solidFill>
@@ -3571,7 +3571,7 @@
         </a:defRPr>
       </a:lvl3pPr>
       <a:lvl4pPr marL="1028700" algn="l" defTabSz="342900" rtl="0" eaLnBrk="1" latinLnBrk="0" hangingPunct="1">
-        <a:defRPr sz="1350" kern="1200">
+        <a:defRPr sz="944" kern="1200">
           <a:solidFill>
             <a:schemeClr val="tx1"/>
           </a:solidFill>
@@ -3581,7 +3581,7 @@
         </a:defRPr>
       </a:lvl4pPr>
       <a:lvl5pPr marL="1371600" algn="l" defTabSz="342900" rtl="0" eaLnBrk="1" latinLnBrk="0" hangingPunct="1">
-        <a:defRPr sz="1350" kern="1200">
+        <a:defRPr sz="944" kern="1200">
           <a:solidFill>
             <a:schemeClr val="tx1"/>
           </a:solidFill>
@@ -3591,7 +3591,7 @@
         </a:defRPr>
       </a:lvl5pPr>
       <a:lvl6pPr marL="1714500" algn="l" defTabSz="342900" rtl="0" eaLnBrk="1" latinLnBrk="0" hangingPunct="1">
-        <a:defRPr sz="1350" kern="1200">
+        <a:defRPr sz="944" kern="1200">
           <a:solidFill>
             <a:schemeClr val="tx1"/>
           </a:solidFill>
@@ -3601,7 +3601,7 @@
         </a:defRPr>
       </a:lvl6pPr>
       <a:lvl7pPr marL="2057400" algn="l" defTabSz="342900" rtl="0" eaLnBrk="1" latinLnBrk="0" hangingPunct="1">
-        <a:defRPr sz="1350" kern="1200">
+        <a:defRPr sz="944" kern="1200">
           <a:solidFill>
             <a:schemeClr val="tx1"/>
           </a:solidFill>
@@ -3611,7 +3611,7 @@
         </a:defRPr>
       </a:lvl7pPr>
       <a:lvl8pPr marL="2400300" algn="l" defTabSz="342900" rtl="0" eaLnBrk="1" latinLnBrk="0" hangingPunct="1">
-        <a:defRPr sz="1350" kern="1200">
+        <a:defRPr sz="944" kern="1200">
           <a:solidFill>
             <a:schemeClr val="tx1"/>
           </a:solidFill>
@@ -3621,7 +3621,7 @@
         </a:defRPr>
       </a:lvl8pPr>
       <a:lvl9pPr marL="2743200" algn="l" defTabSz="342900" rtl="0" eaLnBrk="1" latinLnBrk="0" hangingPunct="1">
-        <a:defRPr sz="1350" kern="1200">
+        <a:defRPr sz="944" kern="1200">
           <a:solidFill>
             <a:schemeClr val="tx1"/>
           </a:solidFill>
@@ -4220,7 +4220,7 @@
       </a:bodyPr>
       <a:lstStyle>
         <a:defPPr algn="ctr">
-          <a:defRPr sz="1000" dirty="0" smtClean="0">
+          <a:defRPr sz="800" dirty="0" smtClean="0">
             <a:latin typeface="Arial" pitchFamily="34" charset="0"/>
             <a:cs typeface="Arial" pitchFamily="34" charset="0"/>
           </a:defRPr>
